--- a/For DBA/2. Подключение к серверу и БД/Подключение к серверу и БД.pptx
+++ b/For DBA/2. Подключение к серверу и БД/Подключение к серверу и БД.pptx
@@ -297,7 +297,7 @@
           <a:p>
             <a:fld id="{B4C71EC6-210F-42DE-9C53-41977AD35B3D}" type="datetimeFigureOut">
               <a:rPr lang="ru-RU" smtClean="0"/>
-              <a:t>09.08.2026</a:t>
+              <a:t>17.10.2026</a:t>
             </a:fld>
             <a:endParaRPr lang="ru-RU"/>
           </a:p>
@@ -462,7 +462,7 @@
           <a:p>
             <a:fld id="{B4C71EC6-210F-42DE-9C53-41977AD35B3D}" type="datetimeFigureOut">
               <a:rPr lang="ru-RU" smtClean="0"/>
-              <a:t>09.08.2026</a:t>
+              <a:t>17.10.2026</a:t>
             </a:fld>
             <a:endParaRPr lang="ru-RU"/>
           </a:p>
@@ -637,7 +637,7 @@
           <a:p>
             <a:fld id="{B4C71EC6-210F-42DE-9C53-41977AD35B3D}" type="datetimeFigureOut">
               <a:rPr lang="ru-RU" smtClean="0"/>
-              <a:t>09.08.2026</a:t>
+              <a:t>17.10.2026</a:t>
             </a:fld>
             <a:endParaRPr lang="ru-RU"/>
           </a:p>
@@ -802,7 +802,7 @@
           <a:p>
             <a:fld id="{B4C71EC6-210F-42DE-9C53-41977AD35B3D}" type="datetimeFigureOut">
               <a:rPr lang="ru-RU" smtClean="0"/>
-              <a:t>09.08.2026</a:t>
+              <a:t>17.10.2026</a:t>
             </a:fld>
             <a:endParaRPr lang="ru-RU"/>
           </a:p>
@@ -1043,7 +1043,7 @@
           <a:p>
             <a:fld id="{B4C71EC6-210F-42DE-9C53-41977AD35B3D}" type="datetimeFigureOut">
               <a:rPr lang="ru-RU" smtClean="0"/>
-              <a:t>09.08.2026</a:t>
+              <a:t>17.10.2026</a:t>
             </a:fld>
             <a:endParaRPr lang="ru-RU"/>
           </a:p>
@@ -1326,7 +1326,7 @@
           <a:p>
             <a:fld id="{B4C71EC6-210F-42DE-9C53-41977AD35B3D}" type="datetimeFigureOut">
               <a:rPr lang="ru-RU" smtClean="0"/>
-              <a:t>09.08.2026</a:t>
+              <a:t>17.10.2026</a:t>
             </a:fld>
             <a:endParaRPr lang="ru-RU"/>
           </a:p>
@@ -1743,7 +1743,7 @@
           <a:p>
             <a:fld id="{B4C71EC6-210F-42DE-9C53-41977AD35B3D}" type="datetimeFigureOut">
               <a:rPr lang="ru-RU" smtClean="0"/>
-              <a:t>09.08.2026</a:t>
+              <a:t>17.10.2026</a:t>
             </a:fld>
             <a:endParaRPr lang="ru-RU"/>
           </a:p>
@@ -1856,7 +1856,7 @@
           <a:p>
             <a:fld id="{B4C71EC6-210F-42DE-9C53-41977AD35B3D}" type="datetimeFigureOut">
               <a:rPr lang="ru-RU" smtClean="0"/>
-              <a:t>09.08.2026</a:t>
+              <a:t>17.10.2026</a:t>
             </a:fld>
             <a:endParaRPr lang="ru-RU"/>
           </a:p>
@@ -1946,7 +1946,7 @@
           <a:p>
             <a:fld id="{B4C71EC6-210F-42DE-9C53-41977AD35B3D}" type="datetimeFigureOut">
               <a:rPr lang="ru-RU" smtClean="0"/>
-              <a:t>09.08.2026</a:t>
+              <a:t>17.10.2026</a:t>
             </a:fld>
             <a:endParaRPr lang="ru-RU"/>
           </a:p>
@@ -2218,7 +2218,7 @@
           <a:p>
             <a:fld id="{B4C71EC6-210F-42DE-9C53-41977AD35B3D}" type="datetimeFigureOut">
               <a:rPr lang="ru-RU" smtClean="0"/>
-              <a:t>09.08.2026</a:t>
+              <a:t>17.10.2026</a:t>
             </a:fld>
             <a:endParaRPr lang="ru-RU"/>
           </a:p>
@@ -2466,7 +2466,7 @@
           <a:p>
             <a:fld id="{B4C71EC6-210F-42DE-9C53-41977AD35B3D}" type="datetimeFigureOut">
               <a:rPr lang="ru-RU" smtClean="0"/>
-              <a:t>09.08.2026</a:t>
+              <a:t>17.10.2026</a:t>
             </a:fld>
             <a:endParaRPr lang="ru-RU"/>
           </a:p>
@@ -2674,7 +2674,7 @@
           <a:p>
             <a:fld id="{B4C71EC6-210F-42DE-9C53-41977AD35B3D}" type="datetimeFigureOut">
               <a:rPr lang="ru-RU" smtClean="0"/>
-              <a:t>09.08.2026</a:t>
+              <a:t>17.10.2026</a:t>
             </a:fld>
             <a:endParaRPr lang="ru-RU"/>
           </a:p>
@@ -3164,7 +3164,7 @@
               <a:t>Просмотр таблиц в подключенной базе </a:t>
             </a:r>
             <a:r>
-              <a:rPr lang="ru-RU" dirty="0" err="1" smtClean="0">
+              <a:rPr lang="ru-RU" dirty="0" smtClean="0">
                 <a:effectLst>
                   <a:outerShdw blurRad="38100" dist="38100" dir="2700000" algn="tl">
                     <a:srgbClr val="000000">
@@ -3173,7 +3173,7 @@
                   </a:outerShdw>
                 </a:effectLst>
               </a:rPr>
-              <a:t>даннных</a:t>
+              <a:t>данных</a:t>
             </a:r>
             <a:endParaRPr lang="ru-RU" dirty="0">
               <a:effectLst>
@@ -3900,12 +3900,12 @@
               <a:t>Проще говоря, это технология, которая обеспечивает безопасную и </a:t>
             </a:r>
             <a:r>
-              <a:rPr lang="ru-RU" dirty="0" err="1"/>
-              <a:t>безпарольную</a:t>
+              <a:rPr lang="ru-RU" dirty="0" smtClean="0"/>
+              <a:t>беспарольную </a:t>
             </a:r>
             <a:r>
               <a:rPr lang="ru-RU" dirty="0"/>
-              <a:t> аутентификацию. Ее основная идея — отделить процесс аутентификации от самого приложения. Вместо того чтобы приложение само обрабатывало пароли, оно использует GSSAPI как универсальный "переводчик" для работы с разными системами безопасности .</a:t>
+              <a:t>аутентификацию. Ее основная идея — отделить процесс аутентификации от самого приложения. Вместо того чтобы приложение само обрабатывало пароли, оно использует GSSAPI как универсальный "переводчик" для работы с разными системами безопасности .</a:t>
             </a:r>
           </a:p>
           <a:p>
@@ -4062,11 +4062,7 @@
             </a:r>
             <a:r>
               <a:rPr lang="ru-RU" sz="1700" dirty="0"/>
-              <a:t>работает, у нее есть </a:t>
-            </a:r>
-            <a:r>
-              <a:rPr lang="ru-RU" sz="1700" dirty="0"/>
-              <a:t>PID </a:t>
+              <a:t>работает, у нее есть PID </a:t>
             </a:r>
             <a:r>
               <a:rPr lang="ru-RU" sz="1700" dirty="0" smtClean="0"/>
@@ -4552,11 +4548,7 @@
             </a:pPr>
             <a:r>
               <a:rPr lang="ru-RU" dirty="0"/>
-              <a:t>Команда </a:t>
-            </a:r>
-            <a:r>
-              <a:rPr lang="ru-RU" dirty="0"/>
-              <a:t>\</a:t>
+              <a:t>Команда \</a:t>
             </a:r>
             <a:r>
               <a:rPr lang="ru-RU" dirty="0" err="1"/>
